--- a/output/doc/user-flow-decks/05-collateral-authoring-and-message-setup.pptx
+++ b/output/doc/user-flow-decks/05-collateral-authoring-and-message-setup.pptx
@@ -3213,7 +3213,7 @@
                 </a:solidFill>
                 <a:latin typeface="Aptos"/>
               </a:rPr>
-              <a:t>Show how campaign assets, collateral schedules, and WhatsApp messages are configured before field reps start sharing.</a:t>
+              <a:t>Show how campaign assets, dashboard shortcuts, collateral schedules, and WhatsApp messages are configured before field reps start sharing.</a:t>
             </a:r>
           </a:p>
         </p:txBody>
@@ -3363,7 +3363,7 @@
                 </a:solidFill>
                 <a:latin typeface="Aptos"/>
               </a:rPr>
-              <a:t>Generated: 2026-04-11</a:t>
+              <a:t>Generated: 2026-04-23</a:t>
             </a:r>
           </a:p>
         </p:txBody>
@@ -4020,7 +4020,7 @@
                 </a:solidFill>
                 <a:latin typeface="Aptos"/>
               </a:rPr>
-              <a:t>Show how campaign assets, collateral schedules, and WhatsApp messages are configured before field reps start sharing.</a:t>
+              <a:t>Show how campaign assets, dashboard shortcuts, collateral schedules, and WhatsApp messages are configured before field reps start sharing.</a:t>
             </a:r>
           </a:p>
         </p:txBody>
@@ -4135,7 +4135,7 @@
                 </a:solidFill>
                 <a:latin typeface="Aptos"/>
               </a:rPr>
-              <a:t>The collateral dashboard is the campaign-scoped control panel for asset inventory, calendar edits, and rep-facing shortcuts.</a:t>
+              <a:t>The collateral dashboard is the campaign-scoped control panel for asset inventory, calendar edits, doctor-upload shortcuts, and rep-facing entry points.</a:t>
             </a:r>
           </a:p>
           <a:p>
@@ -4451,7 +4451,7 @@
         <p:spPr>
           <a:xfrm>
             <a:off x="749808" y="1097280"/>
-            <a:ext cx="4023360" cy="256032"/>
+            <a:ext cx="3931920" cy="4754880"/>
           </a:xfrm>
           <a:prstGeom prst="rect">
             <a:avLst/>
@@ -4459,12 +4459,19 @@
           <a:noFill/>
         </p:spPr>
         <p:txBody>
-          <a:bodyPr wrap="square" anchor="t">
+          <a:bodyPr wrap="square" lIns="0" rIns="0" tIns="0" bIns="0">
             <a:spAutoFit/>
           </a:bodyPr>
           <a:lstStyle/>
           <a:p>
-            <a:pPr algn="l"/>
+            <a:pPr algn="l">
+              <a:spcBef>
+                <a:spcPts val="0"/>
+              </a:spcBef>
+              <a:spcAft>
+                <a:spcPts val="200"/>
+              </a:spcAft>
+            </a:pPr>
             <a:r>
               <a:rPr sz="1200" b="1">
                 <a:solidFill>
@@ -4475,33 +4482,20 @@
               <a:t>User action</a:t>
             </a:r>
           </a:p>
-        </p:txBody>
-      </p:sp>
-      <p:sp>
-        <p:nvSpPr>
-          <p:cNvPr id="8" name="TextBox 7"/>
-          <p:cNvSpPr txBox="1"/>
-          <p:nvPr/>
-        </p:nvSpPr>
-        <p:spPr>
-          <a:xfrm>
-            <a:off x="749808" y="1353312"/>
-            <a:ext cx="3931920" cy="621792"/>
-          </a:xfrm>
-          <a:prstGeom prst="rect">
-            <a:avLst/>
-          </a:prstGeom>
-          <a:noFill/>
-        </p:spPr>
-        <p:txBody>
-          <a:bodyPr wrap="square" anchor="t">
-            <a:spAutoFit/>
-          </a:bodyPr>
-          <a:lstStyle/>
-          <a:p>
-            <a:pPr algn="l"/>
-            <a:r>
-              <a:rPr sz="1600" b="0">
+          <a:p>
+            <a:pPr algn="l">
+              <a:lnSpc>
+                <a:spcPct val="110000"/>
+              </a:lnSpc>
+              <a:spcBef>
+                <a:spcPts val="0"/>
+              </a:spcBef>
+              <a:spcAft>
+                <a:spcPts val="800"/>
+              </a:spcAft>
+            </a:pPr>
+            <a:r>
+              <a:rPr sz="1200">
                 <a:solidFill>
                   <a:srgbClr val="102A43"/>
                 </a:solidFill>
@@ -4510,31 +4504,15 @@
               <a:t>Navigate to the campaign's collateral panel from the campaign inventory or directly through the filtered route.</a:t>
             </a:r>
           </a:p>
-        </p:txBody>
-      </p:sp>
-      <p:sp>
-        <p:nvSpPr>
-          <p:cNvPr id="9" name="TextBox 8"/>
-          <p:cNvSpPr txBox="1"/>
-          <p:nvPr/>
-        </p:nvSpPr>
-        <p:spPr>
-          <a:xfrm>
-            <a:off x="749808" y="2011680"/>
-            <a:ext cx="4023360" cy="256032"/>
-          </a:xfrm>
-          <a:prstGeom prst="rect">
-            <a:avLst/>
-          </a:prstGeom>
-          <a:noFill/>
-        </p:spPr>
-        <p:txBody>
-          <a:bodyPr wrap="square" anchor="t">
-            <a:spAutoFit/>
-          </a:bodyPr>
-          <a:lstStyle/>
-          <a:p>
-            <a:pPr algn="l"/>
+          <a:p>
+            <a:pPr algn="l">
+              <a:spcBef>
+                <a:spcPts val="0"/>
+              </a:spcBef>
+              <a:spcAft>
+                <a:spcPts val="200"/>
+              </a:spcAft>
+            </a:pPr>
             <a:r>
               <a:rPr sz="1200" b="1">
                 <a:solidFill>
@@ -4545,66 +4523,37 @@
               <a:t>What appears on screen</a:t>
             </a:r>
           </a:p>
-        </p:txBody>
-      </p:sp>
-      <p:sp>
-        <p:nvSpPr>
-          <p:cNvPr id="10" name="TextBox 9"/>
-          <p:cNvSpPr txBox="1"/>
-          <p:nvPr/>
-        </p:nvSpPr>
-        <p:spPr>
-          <a:xfrm>
-            <a:off x="749808" y="2267712"/>
-            <a:ext cx="3931920" cy="713232"/>
-          </a:xfrm>
-          <a:prstGeom prst="rect">
-            <a:avLst/>
-          </a:prstGeom>
-          <a:noFill/>
-        </p:spPr>
-        <p:txBody>
-          <a:bodyPr wrap="square" anchor="t">
-            <a:spAutoFit/>
-          </a:bodyPr>
-          <a:lstStyle/>
-          <a:p>
-            <a:pPr algn="l"/>
-            <a:r>
-              <a:rPr sz="1600" b="0">
+          <a:p>
+            <a:pPr algn="l">
+              <a:lnSpc>
+                <a:spcPct val="110000"/>
+              </a:lnSpc>
+              <a:spcBef>
+                <a:spcPts val="0"/>
+              </a:spcBef>
+              <a:spcAft>
+                <a:spcPts val="800"/>
+              </a:spcAft>
+            </a:pPr>
+            <a:r>
+              <a:rPr sz="1200">
                 <a:solidFill>
                   <a:srgbClr val="102A43"/>
                 </a:solidFill>
                 <a:latin typeface="Aptos"/>
               </a:rPr>
-              <a:t>A campaign-scoped dashboard with buttons for Add Collaterals, Edit Calendar, Doctor Bulk Upload, and the field-rep entry links.</a:t>
-            </a:r>
-          </a:p>
-        </p:txBody>
-      </p:sp>
-      <p:sp>
-        <p:nvSpPr>
-          <p:cNvPr id="11" name="TextBox 10"/>
-          <p:cNvSpPr txBox="1"/>
-          <p:nvPr/>
-        </p:nvSpPr>
-        <p:spPr>
-          <a:xfrm>
-            <a:off x="749808" y="3063240"/>
-            <a:ext cx="4023360" cy="256032"/>
-          </a:xfrm>
-          <a:prstGeom prst="rect">
-            <a:avLst/>
-          </a:prstGeom>
-          <a:noFill/>
-        </p:spPr>
-        <p:txBody>
-          <a:bodyPr wrap="square" anchor="t">
-            <a:spAutoFit/>
-          </a:bodyPr>
-          <a:lstStyle/>
-          <a:p>
-            <a:pPr algn="l"/>
+              <a:t>A campaign-scoped dashboard with top buttons for `Add Collaterals`, `Edit Calendar`, `Doctor Bulk Upload`, `Field Rep Login`, and `Back to Home`, plus a collateral table with `Link`, `Edit Dates`, `Replace Collateral`, and `Delete` actions.</a:t>
+            </a:r>
+          </a:p>
+          <a:p>
+            <a:pPr algn="l">
+              <a:spcBef>
+                <a:spcPts val="0"/>
+              </a:spcBef>
+              <a:spcAft>
+                <a:spcPts val="200"/>
+              </a:spcAft>
+            </a:pPr>
             <a:r>
               <a:rPr sz="1200" b="1">
                 <a:solidFill>
@@ -4615,33 +4564,20 @@
               <a:t>Why it matters</a:t>
             </a:r>
           </a:p>
-        </p:txBody>
-      </p:sp>
-      <p:sp>
-        <p:nvSpPr>
-          <p:cNvPr id="12" name="TextBox 11"/>
-          <p:cNvSpPr txBox="1"/>
-          <p:nvPr/>
-        </p:nvSpPr>
-        <p:spPr>
-          <a:xfrm>
-            <a:off x="749808" y="3319272"/>
-            <a:ext cx="3931920" cy="640080"/>
-          </a:xfrm>
-          <a:prstGeom prst="rect">
-            <a:avLst/>
-          </a:prstGeom>
-          <a:noFill/>
-        </p:spPr>
-        <p:txBody>
-          <a:bodyPr wrap="square" anchor="t">
-            <a:spAutoFit/>
-          </a:bodyPr>
-          <a:lstStyle/>
-          <a:p>
-            <a:pPr algn="l"/>
-            <a:r>
-              <a:rPr sz="1500" b="0">
+          <a:p>
+            <a:pPr algn="l">
+              <a:lnSpc>
+                <a:spcPct val="110000"/>
+              </a:lnSpc>
+              <a:spcBef>
+                <a:spcPts val="0"/>
+              </a:spcBef>
+              <a:spcAft>
+                <a:spcPts val="800"/>
+              </a:spcAft>
+            </a:pPr>
+            <a:r>
+              <a:rPr sz="1200">
                 <a:solidFill>
                   <a:srgbClr val="102A43"/>
                 </a:solidFill>
@@ -4650,31 +4586,15 @@
               <a:t>This dashboard is the operator's launch pad for collateral and rep-facing setup.</a:t>
             </a:r>
           </a:p>
-        </p:txBody>
-      </p:sp>
-      <p:sp>
-        <p:nvSpPr>
-          <p:cNvPr id="13" name="TextBox 12"/>
-          <p:cNvSpPr txBox="1"/>
-          <p:nvPr/>
-        </p:nvSpPr>
-        <p:spPr>
-          <a:xfrm>
-            <a:off x="749808" y="4069080"/>
-            <a:ext cx="4023360" cy="256032"/>
-          </a:xfrm>
-          <a:prstGeom prst="rect">
-            <a:avLst/>
-          </a:prstGeom>
-          <a:noFill/>
-        </p:spPr>
-        <p:txBody>
-          <a:bodyPr wrap="square" anchor="t">
-            <a:spAutoFit/>
-          </a:bodyPr>
-          <a:lstStyle/>
-          <a:p>
-            <a:pPr algn="l"/>
+          <a:p>
+            <a:pPr algn="l">
+              <a:spcBef>
+                <a:spcPts val="0"/>
+              </a:spcBef>
+              <a:spcAft>
+                <a:spcPts val="200"/>
+              </a:spcAft>
+            </a:pPr>
             <a:r>
               <a:rPr sz="1200" b="1">
                 <a:solidFill>
@@ -4685,33 +4605,20 @@
               <a:t>Expected result</a:t>
             </a:r>
           </a:p>
-        </p:txBody>
-      </p:sp>
-      <p:sp>
-        <p:nvSpPr>
-          <p:cNvPr id="14" name="TextBox 13"/>
-          <p:cNvSpPr txBox="1"/>
-          <p:nvPr/>
-        </p:nvSpPr>
-        <p:spPr>
-          <a:xfrm>
-            <a:off x="749808" y="4325112"/>
-            <a:ext cx="3931920" cy="566928"/>
-          </a:xfrm>
-          <a:prstGeom prst="rect">
-            <a:avLst/>
-          </a:prstGeom>
-          <a:noFill/>
-        </p:spPr>
-        <p:txBody>
-          <a:bodyPr wrap="square" anchor="t">
-            <a:spAutoFit/>
-          </a:bodyPr>
-          <a:lstStyle/>
-          <a:p>
-            <a:pPr algn="l"/>
-            <a:r>
-              <a:rPr sz="1500" b="0">
+          <a:p>
+            <a:pPr algn="l">
+              <a:lnSpc>
+                <a:spcPct val="110000"/>
+              </a:lnSpc>
+              <a:spcBef>
+                <a:spcPts val="0"/>
+              </a:spcBef>
+              <a:spcAft>
+                <a:spcPts val="800"/>
+              </a:spcAft>
+            </a:pPr>
+            <a:r>
+              <a:rPr sz="1200">
                 <a:solidFill>
                   <a:srgbClr val="102A43"/>
                 </a:solidFill>
@@ -4720,31 +4627,15 @@
               <a:t>The operator sees the current collateral inventory and the next setup actions in one place.</a:t>
             </a:r>
           </a:p>
-        </p:txBody>
-      </p:sp>
-      <p:sp>
-        <p:nvSpPr>
-          <p:cNvPr id="15" name="TextBox 14"/>
-          <p:cNvSpPr txBox="1"/>
-          <p:nvPr/>
-        </p:nvSpPr>
-        <p:spPr>
-          <a:xfrm>
-            <a:off x="749808" y="4965192"/>
-            <a:ext cx="4023360" cy="256032"/>
-          </a:xfrm>
-          <a:prstGeom prst="rect">
-            <a:avLst/>
-          </a:prstGeom>
-          <a:noFill/>
-        </p:spPr>
-        <p:txBody>
-          <a:bodyPr wrap="square" anchor="t">
-            <a:spAutoFit/>
-          </a:bodyPr>
-          <a:lstStyle/>
-          <a:p>
-            <a:pPr algn="l"/>
+          <a:p>
+            <a:pPr algn="l">
+              <a:spcBef>
+                <a:spcPts val="0"/>
+              </a:spcBef>
+              <a:spcAft>
+                <a:spcPts val="200"/>
+              </a:spcAft>
+            </a:pPr>
             <a:r>
               <a:rPr sz="1200" b="1">
                 <a:solidFill>
@@ -4755,46 +4646,33 @@
               <a:t>Trainer note</a:t>
             </a:r>
           </a:p>
-        </p:txBody>
-      </p:sp>
-      <p:sp>
-        <p:nvSpPr>
-          <p:cNvPr id="16" name="TextBox 15"/>
-          <p:cNvSpPr txBox="1"/>
-          <p:nvPr/>
-        </p:nvSpPr>
-        <p:spPr>
-          <a:xfrm>
-            <a:off x="749808" y="5212080"/>
-            <a:ext cx="3931920" cy="640080"/>
-          </a:xfrm>
-          <a:prstGeom prst="rect">
-            <a:avLst/>
-          </a:prstGeom>
-          <a:noFill/>
-        </p:spPr>
-        <p:txBody>
-          <a:bodyPr wrap="square" anchor="t">
-            <a:spAutoFit/>
-          </a:bodyPr>
-          <a:lstStyle/>
-          <a:p>
-            <a:pPr algn="l"/>
-            <a:r>
-              <a:rPr sz="1300" b="0">
+          <a:p>
+            <a:pPr algn="l">
+              <a:lnSpc>
+                <a:spcPct val="110000"/>
+              </a:lnSpc>
+              <a:spcBef>
+                <a:spcPts val="0"/>
+              </a:spcBef>
+              <a:spcAft>
+                <a:spcPts val="0"/>
+              </a:spcAft>
+            </a:pPr>
+            <a:r>
+              <a:rPr sz="1100">
                 <a:solidFill>
                   <a:srgbClr val="52667A"/>
                 </a:solidFill>
                 <a:latin typeface="Aptos"/>
               </a:rPr>
-              <a:t>This route is campaign-aware and surfaces the same brand campaign ID used elsewhere in the product.</a:t>
-            </a:r>
-          </a:p>
-        </p:txBody>
-      </p:sp>
-      <p:sp>
-        <p:nvSpPr>
-          <p:cNvPr id="17" name="Rounded Rectangle 16"/>
+              <a:t>This route is campaign-aware and surfaces the same brand campaign ID used elsewhere in the product. The dashboard search box also lets trainers jump directly between campaigns by brand campaign ID.</a:t>
+            </a:r>
+          </a:p>
+        </p:txBody>
+      </p:sp>
+      <p:sp>
+        <p:nvSpPr>
+          <p:cNvPr id="8" name="Rounded Rectangle 7"/>
           <p:cNvSpPr/>
           <p:nvPr/>
         </p:nvSpPr>
@@ -4839,7 +4717,7 @@
       </p:sp>
       <p:sp>
         <p:nvSpPr>
-          <p:cNvPr id="18" name="TextBox 17"/>
+          <p:cNvPr id="9" name="TextBox 8"/>
           <p:cNvSpPr txBox="1"/>
           <p:nvPr/>
         </p:nvSpPr>
@@ -4874,7 +4752,7 @@
       </p:sp>
       <p:pic>
         <p:nvPicPr>
-          <p:cNvPr id="19" name="Picture 18" descr="collateral-dashboard.png"/>
+          <p:cNvPr id="10" name="Picture 9" descr="collateral-dashboard.png"/>
           <p:cNvPicPr>
             <a:picLocks noChangeAspect="1"/>
           </p:cNvPicPr>
@@ -4898,7 +4776,7 @@
       </p:pic>
       <p:sp>
         <p:nvSpPr>
-          <p:cNvPr id="20" name="TextBox 19"/>
+          <p:cNvPr id="11" name="TextBox 10"/>
           <p:cNvSpPr txBox="1"/>
           <p:nvPr/>
         </p:nvSpPr>
@@ -4933,7 +4811,7 @@
       </p:sp>
       <p:sp>
         <p:nvSpPr>
-          <p:cNvPr id="21" name="TextBox 20"/>
+          <p:cNvPr id="12" name="TextBox 11"/>
           <p:cNvSpPr txBox="1"/>
           <p:nvPr/>
         </p:nvSpPr>
@@ -5206,7 +5084,7 @@
         <p:spPr>
           <a:xfrm>
             <a:off x="749808" y="1097280"/>
-            <a:ext cx="4023360" cy="256032"/>
+            <a:ext cx="3931920" cy="4754880"/>
           </a:xfrm>
           <a:prstGeom prst="rect">
             <a:avLst/>
@@ -5214,12 +5092,19 @@
           <a:noFill/>
         </p:spPr>
         <p:txBody>
-          <a:bodyPr wrap="square" anchor="t">
+          <a:bodyPr wrap="square" lIns="0" rIns="0" tIns="0" bIns="0">
             <a:spAutoFit/>
           </a:bodyPr>
           <a:lstStyle/>
           <a:p>
-            <a:pPr algn="l"/>
+            <a:pPr algn="l">
+              <a:spcBef>
+                <a:spcPts val="0"/>
+              </a:spcBef>
+              <a:spcAft>
+                <a:spcPts val="200"/>
+              </a:spcAft>
+            </a:pPr>
             <a:r>
               <a:rPr sz="1200" b="1">
                 <a:solidFill>
@@ -5230,66 +5115,37 @@
               <a:t>User action</a:t>
             </a:r>
           </a:p>
-        </p:txBody>
-      </p:sp>
-      <p:sp>
-        <p:nvSpPr>
-          <p:cNvPr id="8" name="TextBox 7"/>
-          <p:cNvSpPr txBox="1"/>
-          <p:nvPr/>
-        </p:nvSpPr>
-        <p:spPr>
-          <a:xfrm>
-            <a:off x="749808" y="1353312"/>
-            <a:ext cx="3931920" cy="621792"/>
-          </a:xfrm>
-          <a:prstGeom prst="rect">
-            <a:avLst/>
-          </a:prstGeom>
-          <a:noFill/>
-        </p:spPr>
-        <p:txBody>
-          <a:bodyPr wrap="square" anchor="t">
-            <a:spAutoFit/>
-          </a:bodyPr>
-          <a:lstStyle/>
-          <a:p>
-            <a:pPr algn="l"/>
-            <a:r>
-              <a:rPr sz="1600" b="0">
+          <a:p>
+            <a:pPr algn="l">
+              <a:lnSpc>
+                <a:spcPct val="110000"/>
+              </a:lnSpc>
+              <a:spcBef>
+                <a:spcPts val="0"/>
+              </a:spcBef>
+              <a:spcAft>
+                <a:spcPts val="800"/>
+              </a:spcAft>
+            </a:pPr>
+            <a:r>
+              <a:rPr sz="1100">
                 <a:solidFill>
                   <a:srgbClr val="102A43"/>
                 </a:solidFill>
                 <a:latin typeface="Aptos"/>
               </a:rPr>
-              <a:t>Open the Add Collateral form, upload the PDF and banners, choose the type, and add descriptive or webinar metadata.</a:t>
-            </a:r>
-          </a:p>
-        </p:txBody>
-      </p:sp>
-      <p:sp>
-        <p:nvSpPr>
-          <p:cNvPr id="9" name="TextBox 8"/>
-          <p:cNvSpPr txBox="1"/>
-          <p:nvPr/>
-        </p:nvSpPr>
-        <p:spPr>
-          <a:xfrm>
-            <a:off x="749808" y="2011680"/>
-            <a:ext cx="4023360" cy="256032"/>
-          </a:xfrm>
-          <a:prstGeom prst="rect">
-            <a:avLst/>
-          </a:prstGeom>
-          <a:noFill/>
-        </p:spPr>
-        <p:txBody>
-          <a:bodyPr wrap="square" anchor="t">
-            <a:spAutoFit/>
-          </a:bodyPr>
-          <a:lstStyle/>
-          <a:p>
-            <a:pPr algn="l"/>
+              <a:t>Open the Add Collateral form, choose the campaign and purpose, upload the PDF and banners, choose the type, and add descriptive or webinar metadata before submitting.</a:t>
+            </a:r>
+          </a:p>
+          <a:p>
+            <a:pPr algn="l">
+              <a:spcBef>
+                <a:spcPts val="0"/>
+              </a:spcBef>
+              <a:spcAft>
+                <a:spcPts val="200"/>
+              </a:spcAft>
+            </a:pPr>
             <a:r>
               <a:rPr sz="1200" b="1">
                 <a:solidFill>
@@ -5300,66 +5156,37 @@
               <a:t>What appears on screen</a:t>
             </a:r>
           </a:p>
-        </p:txBody>
-      </p:sp>
-      <p:sp>
-        <p:nvSpPr>
-          <p:cNvPr id="10" name="TextBox 9"/>
-          <p:cNvSpPr txBox="1"/>
-          <p:nvPr/>
-        </p:nvSpPr>
-        <p:spPr>
-          <a:xfrm>
-            <a:off x="749808" y="2267712"/>
-            <a:ext cx="3931920" cy="713232"/>
-          </a:xfrm>
-          <a:prstGeom prst="rect">
-            <a:avLst/>
-          </a:prstGeom>
-          <a:noFill/>
-        </p:spPr>
-        <p:txBody>
-          <a:bodyPr wrap="square" anchor="t">
-            <a:spAutoFit/>
-          </a:bodyPr>
-          <a:lstStyle/>
-          <a:p>
-            <a:pPr algn="l"/>
-            <a:r>
-              <a:rPr sz="1600" b="0">
+          <a:p>
+            <a:pPr algn="l">
+              <a:lnSpc>
+                <a:spcPct val="110000"/>
+              </a:lnSpc>
+              <a:spcBef>
+                <a:spcPts val="0"/>
+              </a:spcBef>
+              <a:spcAft>
+                <a:spcPts val="800"/>
+              </a:spcAft>
+            </a:pPr>
+            <a:r>
+              <a:rPr sz="1100">
                 <a:solidFill>
                   <a:srgbClr val="102A43"/>
                 </a:solidFill>
                 <a:latin typeface="Aptos"/>
               </a:rPr>
-              <a:t>A large multipart form for purpose, content title, content ID, collateral type, PDF or Vimeo input, banners, doctor display name, and webinar details.</a:t>
-            </a:r>
-          </a:p>
-        </p:txBody>
-      </p:sp>
-      <p:sp>
-        <p:nvSpPr>
-          <p:cNvPr id="11" name="TextBox 10"/>
-          <p:cNvSpPr txBox="1"/>
-          <p:nvPr/>
-        </p:nvSpPr>
-        <p:spPr>
-          <a:xfrm>
-            <a:off x="749808" y="3063240"/>
-            <a:ext cx="4023360" cy="256032"/>
-          </a:xfrm>
-          <a:prstGeom prst="rect">
-            <a:avLst/>
-          </a:prstGeom>
-          <a:noFill/>
-        </p:spPr>
-        <p:txBody>
-          <a:bodyPr wrap="square" anchor="t">
-            <a:spAutoFit/>
-          </a:bodyPr>
-          <a:lstStyle/>
-          <a:p>
-            <a:pPr algn="l"/>
+              <a:t>A large multipart form for campaign, purpose, content title, content ID, collateral type, PDF or Vimeo input, banners, doctor display name, description, webinar details, and an inline WhatsApp message text area.</a:t>
+            </a:r>
+          </a:p>
+          <a:p>
+            <a:pPr algn="l">
+              <a:spcBef>
+                <a:spcPts val="0"/>
+              </a:spcBef>
+              <a:spcAft>
+                <a:spcPts val="200"/>
+              </a:spcAft>
+            </a:pPr>
             <a:r>
               <a:rPr sz="1200" b="1">
                 <a:solidFill>
@@ -5370,33 +5197,20 @@
               <a:t>Why it matters</a:t>
             </a:r>
           </a:p>
-        </p:txBody>
-      </p:sp>
-      <p:sp>
-        <p:nvSpPr>
-          <p:cNvPr id="12" name="TextBox 11"/>
-          <p:cNvSpPr txBox="1"/>
-          <p:nvPr/>
-        </p:nvSpPr>
-        <p:spPr>
-          <a:xfrm>
-            <a:off x="749808" y="3319272"/>
-            <a:ext cx="3931920" cy="640080"/>
-          </a:xfrm>
-          <a:prstGeom prst="rect">
-            <a:avLst/>
-          </a:prstGeom>
-          <a:noFill/>
-        </p:spPr>
-        <p:txBody>
-          <a:bodyPr wrap="square" anchor="t">
-            <a:spAutoFit/>
-          </a:bodyPr>
-          <a:lstStyle/>
-          <a:p>
-            <a:pPr algn="l"/>
-            <a:r>
-              <a:rPr sz="1500" b="0">
+          <a:p>
+            <a:pPr algn="l">
+              <a:lnSpc>
+                <a:spcPct val="110000"/>
+              </a:lnSpc>
+              <a:spcBef>
+                <a:spcPts val="0"/>
+              </a:spcBef>
+              <a:spcAft>
+                <a:spcPts val="800"/>
+              </a:spcAft>
+            </a:pPr>
+            <a:r>
+              <a:rPr sz="1100">
                 <a:solidFill>
                   <a:srgbClr val="102A43"/>
                 </a:solidFill>
@@ -5405,31 +5219,15 @@
               <a:t>This screen defines what the doctor ultimately sees after verification.</a:t>
             </a:r>
           </a:p>
-        </p:txBody>
-      </p:sp>
-      <p:sp>
-        <p:nvSpPr>
-          <p:cNvPr id="13" name="TextBox 12"/>
-          <p:cNvSpPr txBox="1"/>
-          <p:nvPr/>
-        </p:nvSpPr>
-        <p:spPr>
-          <a:xfrm>
-            <a:off x="749808" y="4069080"/>
-            <a:ext cx="4023360" cy="256032"/>
-          </a:xfrm>
-          <a:prstGeom prst="rect">
-            <a:avLst/>
-          </a:prstGeom>
-          <a:noFill/>
-        </p:spPr>
-        <p:txBody>
-          <a:bodyPr wrap="square" anchor="t">
-            <a:spAutoFit/>
-          </a:bodyPr>
-          <a:lstStyle/>
-          <a:p>
-            <a:pPr algn="l"/>
+          <a:p>
+            <a:pPr algn="l">
+              <a:spcBef>
+                <a:spcPts val="0"/>
+              </a:spcBef>
+              <a:spcAft>
+                <a:spcPts val="200"/>
+              </a:spcAft>
+            </a:pPr>
             <a:r>
               <a:rPr sz="1200" b="1">
                 <a:solidFill>
@@ -5440,33 +5238,20 @@
               <a:t>Expected result</a:t>
             </a:r>
           </a:p>
-        </p:txBody>
-      </p:sp>
-      <p:sp>
-        <p:nvSpPr>
-          <p:cNvPr id="14" name="TextBox 13"/>
-          <p:cNvSpPr txBox="1"/>
-          <p:nvPr/>
-        </p:nvSpPr>
-        <p:spPr>
-          <a:xfrm>
-            <a:off x="749808" y="4325112"/>
-            <a:ext cx="3931920" cy="566928"/>
-          </a:xfrm>
-          <a:prstGeom prst="rect">
-            <a:avLst/>
-          </a:prstGeom>
-          <a:noFill/>
-        </p:spPr>
-        <p:txBody>
-          <a:bodyPr wrap="square" anchor="t">
-            <a:spAutoFit/>
-          </a:bodyPr>
-          <a:lstStyle/>
-          <a:p>
-            <a:pPr algn="l"/>
-            <a:r>
-              <a:rPr sz="1500" b="0">
+          <a:p>
+            <a:pPr algn="l">
+              <a:lnSpc>
+                <a:spcPct val="110000"/>
+              </a:lnSpc>
+              <a:spcBef>
+                <a:spcPts val="0"/>
+              </a:spcBef>
+              <a:spcAft>
+                <a:spcPts val="800"/>
+              </a:spcAft>
+            </a:pPr>
+            <a:r>
+              <a:rPr sz="1100">
                 <a:solidFill>
                   <a:srgbClr val="102A43"/>
                 </a:solidFill>
@@ -5475,31 +5260,15 @@
               <a:t>The campaign has a polished collateral record that can be linked and shared.</a:t>
             </a:r>
           </a:p>
-        </p:txBody>
-      </p:sp>
-      <p:sp>
-        <p:nvSpPr>
-          <p:cNvPr id="15" name="TextBox 14"/>
-          <p:cNvSpPr txBox="1"/>
-          <p:nvPr/>
-        </p:nvSpPr>
-        <p:spPr>
-          <a:xfrm>
-            <a:off x="749808" y="4965192"/>
-            <a:ext cx="4023360" cy="256032"/>
-          </a:xfrm>
-          <a:prstGeom prst="rect">
-            <a:avLst/>
-          </a:prstGeom>
-          <a:noFill/>
-        </p:spPr>
-        <p:txBody>
-          <a:bodyPr wrap="square" anchor="t">
-            <a:spAutoFit/>
-          </a:bodyPr>
-          <a:lstStyle/>
-          <a:p>
-            <a:pPr algn="l"/>
+          <a:p>
+            <a:pPr algn="l">
+              <a:spcBef>
+                <a:spcPts val="0"/>
+              </a:spcBef>
+              <a:spcAft>
+                <a:spcPts val="200"/>
+              </a:spcAft>
+            </a:pPr>
             <a:r>
               <a:rPr sz="1200" b="1">
                 <a:solidFill>
@@ -5510,46 +5279,33 @@
               <a:t>Trainer note</a:t>
             </a:r>
           </a:p>
-        </p:txBody>
-      </p:sp>
-      <p:sp>
-        <p:nvSpPr>
-          <p:cNvPr id="16" name="TextBox 15"/>
-          <p:cNvSpPr txBox="1"/>
-          <p:nvPr/>
-        </p:nvSpPr>
-        <p:spPr>
-          <a:xfrm>
-            <a:off x="749808" y="5212080"/>
-            <a:ext cx="3931920" cy="640080"/>
-          </a:xfrm>
-          <a:prstGeom prst="rect">
-            <a:avLst/>
-          </a:prstGeom>
-          <a:noFill/>
-        </p:spPr>
-        <p:txBody>
-          <a:bodyPr wrap="square" anchor="t">
-            <a:spAutoFit/>
-          </a:bodyPr>
-          <a:lstStyle/>
-          <a:p>
-            <a:pPr algn="l"/>
-            <a:r>
-              <a:rPr sz="1300" b="0">
+          <a:p>
+            <a:pPr algn="l">
+              <a:lnSpc>
+                <a:spcPct val="110000"/>
+              </a:lnSpc>
+              <a:spcBef>
+                <a:spcPts val="0"/>
+              </a:spcBef>
+              <a:spcAft>
+                <a:spcPts val="0"/>
+              </a:spcAft>
+            </a:pPr>
+            <a:r>
+              <a:rPr sz="1100">
                 <a:solidFill>
                   <a:srgbClr val="52667A"/>
                 </a:solidFill>
                 <a:latin typeface="Aptos"/>
               </a:rPr>
-              <a:t>The form automatically creates a message row when a collateral is saved, which is why the message-management screen is part of the same training segment.</a:t>
-            </a:r>
-          </a:p>
-        </p:txBody>
-      </p:sp>
-      <p:sp>
-        <p:nvSpPr>
-          <p:cNvPr id="17" name="Rounded Rectangle 16"/>
+              <a:t>The type selector changes which asset inputs are visible: PDF, Vimeo, or both. The submit button saves both the collateral record and the optional WhatsApp message text for that campaign-collateral pair.</a:t>
+            </a:r>
+          </a:p>
+        </p:txBody>
+      </p:sp>
+      <p:sp>
+        <p:nvSpPr>
+          <p:cNvPr id="8" name="Rounded Rectangle 7"/>
           <p:cNvSpPr/>
           <p:nvPr/>
         </p:nvSpPr>
@@ -5594,7 +5350,7 @@
       </p:sp>
       <p:sp>
         <p:nvSpPr>
-          <p:cNvPr id="18" name="TextBox 17"/>
+          <p:cNvPr id="9" name="TextBox 8"/>
           <p:cNvSpPr txBox="1"/>
           <p:nvPr/>
         </p:nvSpPr>
@@ -5629,7 +5385,7 @@
       </p:sp>
       <p:pic>
         <p:nvPicPr>
-          <p:cNvPr id="19" name="Picture 18" descr="add-collateral-form.png"/>
+          <p:cNvPr id="10" name="Picture 9" descr="add-collateral-form.png"/>
           <p:cNvPicPr>
             <a:picLocks noChangeAspect="1"/>
           </p:cNvPicPr>
@@ -5653,7 +5409,7 @@
       </p:pic>
       <p:sp>
         <p:nvSpPr>
-          <p:cNvPr id="20" name="TextBox 19"/>
+          <p:cNvPr id="11" name="TextBox 10"/>
           <p:cNvSpPr txBox="1"/>
           <p:nvPr/>
         </p:nvSpPr>
@@ -5688,7 +5444,7 @@
       </p:sp>
       <p:sp>
         <p:nvSpPr>
-          <p:cNvPr id="21" name="TextBox 20"/>
+          <p:cNvPr id="12" name="TextBox 11"/>
           <p:cNvSpPr txBox="1"/>
           <p:nvPr/>
         </p:nvSpPr>
@@ -5961,7 +5717,7 @@
         <p:spPr>
           <a:xfrm>
             <a:off x="749808" y="1097280"/>
-            <a:ext cx="4023360" cy="256032"/>
+            <a:ext cx="3931920" cy="4754880"/>
           </a:xfrm>
           <a:prstGeom prst="rect">
             <a:avLst/>
@@ -5969,12 +5725,19 @@
           <a:noFill/>
         </p:spPr>
         <p:txBody>
-          <a:bodyPr wrap="square" anchor="t">
+          <a:bodyPr wrap="square" lIns="0" rIns="0" tIns="0" bIns="0">
             <a:spAutoFit/>
           </a:bodyPr>
           <a:lstStyle/>
           <a:p>
-            <a:pPr algn="l"/>
+            <a:pPr algn="l">
+              <a:spcBef>
+                <a:spcPts val="0"/>
+              </a:spcBef>
+              <a:spcAft>
+                <a:spcPts val="200"/>
+              </a:spcAft>
+            </a:pPr>
             <a:r>
               <a:rPr sz="1200" b="1">
                 <a:solidFill>
@@ -5985,33 +5748,20 @@
               <a:t>User action</a:t>
             </a:r>
           </a:p>
-        </p:txBody>
-      </p:sp>
-      <p:sp>
-        <p:nvSpPr>
-          <p:cNvPr id="8" name="TextBox 7"/>
-          <p:cNvSpPr txBox="1"/>
-          <p:nvPr/>
-        </p:nvSpPr>
-        <p:spPr>
-          <a:xfrm>
-            <a:off x="749808" y="1353312"/>
-            <a:ext cx="3931920" cy="621792"/>
-          </a:xfrm>
-          <a:prstGeom prst="rect">
-            <a:avLst/>
-          </a:prstGeom>
-          <a:noFill/>
-        </p:spPr>
-        <p:txBody>
-          <a:bodyPr wrap="square" anchor="t">
-            <a:spAutoFit/>
-          </a:bodyPr>
-          <a:lstStyle/>
-          <a:p>
-            <a:pPr algn="l"/>
-            <a:r>
-              <a:rPr sz="1600" b="0">
+          <a:p>
+            <a:pPr algn="l">
+              <a:lnSpc>
+                <a:spcPct val="110000"/>
+              </a:lnSpc>
+              <a:spcBef>
+                <a:spcPts val="0"/>
+              </a:spcBef>
+              <a:spcAft>
+                <a:spcPts val="800"/>
+              </a:spcAft>
+            </a:pPr>
+            <a:r>
+              <a:rPr sz="1300">
                 <a:solidFill>
                   <a:srgbClr val="102A43"/>
                 </a:solidFill>
@@ -6020,31 +5770,15 @@
               <a:t>Open the Collateral Messages Management page and inspect the message linked to the collateral and campaign pair.</a:t>
             </a:r>
           </a:p>
-        </p:txBody>
-      </p:sp>
-      <p:sp>
-        <p:nvSpPr>
-          <p:cNvPr id="9" name="TextBox 8"/>
-          <p:cNvSpPr txBox="1"/>
-          <p:nvPr/>
-        </p:nvSpPr>
-        <p:spPr>
-          <a:xfrm>
-            <a:off x="749808" y="2011680"/>
-            <a:ext cx="4023360" cy="256032"/>
-          </a:xfrm>
-          <a:prstGeom prst="rect">
-            <a:avLst/>
-          </a:prstGeom>
-          <a:noFill/>
-        </p:spPr>
-        <p:txBody>
-          <a:bodyPr wrap="square" anchor="t">
-            <a:spAutoFit/>
-          </a:bodyPr>
-          <a:lstStyle/>
-          <a:p>
-            <a:pPr algn="l"/>
+          <a:p>
+            <a:pPr algn="l">
+              <a:spcBef>
+                <a:spcPts val="0"/>
+              </a:spcBef>
+              <a:spcAft>
+                <a:spcPts val="200"/>
+              </a:spcAft>
+            </a:pPr>
             <a:r>
               <a:rPr sz="1200" b="1">
                 <a:solidFill>
@@ -6055,66 +5789,37 @@
               <a:t>What appears on screen</a:t>
             </a:r>
           </a:p>
-        </p:txBody>
-      </p:sp>
-      <p:sp>
-        <p:nvSpPr>
-          <p:cNvPr id="10" name="TextBox 9"/>
-          <p:cNvSpPr txBox="1"/>
-          <p:nvPr/>
-        </p:nvSpPr>
-        <p:spPr>
-          <a:xfrm>
-            <a:off x="749808" y="2267712"/>
-            <a:ext cx="3931920" cy="713232"/>
-          </a:xfrm>
-          <a:prstGeom prst="rect">
-            <a:avLst/>
-          </a:prstGeom>
-          <a:noFill/>
-        </p:spPr>
-        <p:txBody>
-          <a:bodyPr wrap="square" anchor="t">
-            <a:spAutoFit/>
-          </a:bodyPr>
-          <a:lstStyle/>
-          <a:p>
-            <a:pPr algn="l"/>
-            <a:r>
-              <a:rPr sz="1600" b="0">
+          <a:p>
+            <a:pPr algn="l">
+              <a:lnSpc>
+                <a:spcPct val="110000"/>
+              </a:lnSpc>
+              <a:spcBef>
+                <a:spcPts val="0"/>
+              </a:spcBef>
+              <a:spcAft>
+                <a:spcPts val="800"/>
+              </a:spcAft>
+            </a:pPr>
+            <a:r>
+              <a:rPr sz="1300">
                 <a:solidFill>
                   <a:srgbClr val="102A43"/>
                 </a:solidFill>
                 <a:latin typeface="Aptos"/>
               </a:rPr>
-              <a:t>A searchable message list with campaign ID, collateral, message preview, status, and actions.</a:t>
-            </a:r>
-          </a:p>
-        </p:txBody>
-      </p:sp>
-      <p:sp>
-        <p:nvSpPr>
-          <p:cNvPr id="11" name="TextBox 10"/>
-          <p:cNvSpPr txBox="1"/>
-          <p:nvPr/>
-        </p:nvSpPr>
-        <p:spPr>
-          <a:xfrm>
-            <a:off x="749808" y="3063240"/>
-            <a:ext cx="4023360" cy="256032"/>
-          </a:xfrm>
-          <a:prstGeom prst="rect">
-            <a:avLst/>
-          </a:prstGeom>
-          <a:noFill/>
-        </p:spPr>
-        <p:txBody>
-          <a:bodyPr wrap="square" anchor="t">
-            <a:spAutoFit/>
-          </a:bodyPr>
-          <a:lstStyle/>
-          <a:p>
-            <a:pPr algn="l"/>
+              <a:t>A searchable message list with campaign and collateral filters, message preview, status, created date, and edit/delete actions.</a:t>
+            </a:r>
+          </a:p>
+          <a:p>
+            <a:pPr algn="l">
+              <a:spcBef>
+                <a:spcPts val="0"/>
+              </a:spcBef>
+              <a:spcAft>
+                <a:spcPts val="200"/>
+              </a:spcAft>
+            </a:pPr>
             <a:r>
               <a:rPr sz="1200" b="1">
                 <a:solidFill>
@@ -6125,33 +5830,20 @@
               <a:t>Why it matters</a:t>
             </a:r>
           </a:p>
-        </p:txBody>
-      </p:sp>
-      <p:sp>
-        <p:nvSpPr>
-          <p:cNvPr id="12" name="TextBox 11"/>
-          <p:cNvSpPr txBox="1"/>
-          <p:nvPr/>
-        </p:nvSpPr>
-        <p:spPr>
-          <a:xfrm>
-            <a:off x="749808" y="3319272"/>
-            <a:ext cx="3931920" cy="640080"/>
-          </a:xfrm>
-          <a:prstGeom prst="rect">
-            <a:avLst/>
-          </a:prstGeom>
-          <a:noFill/>
-        </p:spPr>
-        <p:txBody>
-          <a:bodyPr wrap="square" anchor="t">
-            <a:spAutoFit/>
-          </a:bodyPr>
-          <a:lstStyle/>
-          <a:p>
-            <a:pPr algn="l"/>
-            <a:r>
-              <a:rPr sz="1500" b="0">
+          <a:p>
+            <a:pPr algn="l">
+              <a:lnSpc>
+                <a:spcPct val="110000"/>
+              </a:lnSpc>
+              <a:spcBef>
+                <a:spcPts val="0"/>
+              </a:spcBef>
+              <a:spcAft>
+                <a:spcPts val="800"/>
+              </a:spcAft>
+            </a:pPr>
+            <a:r>
+              <a:rPr sz="1300">
                 <a:solidFill>
                   <a:srgbClr val="102A43"/>
                 </a:solidFill>
@@ -6160,31 +5852,15 @@
               <a:t>The share experience depends on good rep-facing message text that includes the `$collateralLinks` placeholder.</a:t>
             </a:r>
           </a:p>
-        </p:txBody>
-      </p:sp>
-      <p:sp>
-        <p:nvSpPr>
-          <p:cNvPr id="13" name="TextBox 12"/>
-          <p:cNvSpPr txBox="1"/>
-          <p:nvPr/>
-        </p:nvSpPr>
-        <p:spPr>
-          <a:xfrm>
-            <a:off x="749808" y="4069080"/>
-            <a:ext cx="4023360" cy="256032"/>
-          </a:xfrm>
-          <a:prstGeom prst="rect">
-            <a:avLst/>
-          </a:prstGeom>
-          <a:noFill/>
-        </p:spPr>
-        <p:txBody>
-          <a:bodyPr wrap="square" anchor="t">
-            <a:spAutoFit/>
-          </a:bodyPr>
-          <a:lstStyle/>
-          <a:p>
-            <a:pPr algn="l"/>
+          <a:p>
+            <a:pPr algn="l">
+              <a:spcBef>
+                <a:spcPts val="0"/>
+              </a:spcBef>
+              <a:spcAft>
+                <a:spcPts val="200"/>
+              </a:spcAft>
+            </a:pPr>
             <a:r>
               <a:rPr sz="1200" b="1">
                 <a:solidFill>
@@ -6195,33 +5871,20 @@
               <a:t>Expected result</a:t>
             </a:r>
           </a:p>
-        </p:txBody>
-      </p:sp>
-      <p:sp>
-        <p:nvSpPr>
-          <p:cNvPr id="14" name="TextBox 13"/>
-          <p:cNvSpPr txBox="1"/>
-          <p:nvPr/>
-        </p:nvSpPr>
-        <p:spPr>
-          <a:xfrm>
-            <a:off x="749808" y="4325112"/>
-            <a:ext cx="3931920" cy="566928"/>
-          </a:xfrm>
-          <a:prstGeom prst="rect">
-            <a:avLst/>
-          </a:prstGeom>
-          <a:noFill/>
-        </p:spPr>
-        <p:txBody>
-          <a:bodyPr wrap="square" anchor="t">
-            <a:spAutoFit/>
-          </a:bodyPr>
-          <a:lstStyle/>
-          <a:p>
-            <a:pPr algn="l"/>
-            <a:r>
-              <a:rPr sz="1500" b="0">
+          <a:p>
+            <a:pPr algn="l">
+              <a:lnSpc>
+                <a:spcPct val="110000"/>
+              </a:lnSpc>
+              <a:spcBef>
+                <a:spcPts val="0"/>
+              </a:spcBef>
+              <a:spcAft>
+                <a:spcPts val="800"/>
+              </a:spcAft>
+            </a:pPr>
+            <a:r>
+              <a:rPr sz="1300">
                 <a:solidFill>
                   <a:srgbClr val="102A43"/>
                 </a:solidFill>
@@ -6230,31 +5893,15 @@
               <a:t>The active message is appropriate for the campaign and collateral being launched.</a:t>
             </a:r>
           </a:p>
-        </p:txBody>
-      </p:sp>
-      <p:sp>
-        <p:nvSpPr>
-          <p:cNvPr id="15" name="TextBox 14"/>
-          <p:cNvSpPr txBox="1"/>
-          <p:nvPr/>
-        </p:nvSpPr>
-        <p:spPr>
-          <a:xfrm>
-            <a:off x="749808" y="4965192"/>
-            <a:ext cx="4023360" cy="256032"/>
-          </a:xfrm>
-          <a:prstGeom prst="rect">
-            <a:avLst/>
-          </a:prstGeom>
-          <a:noFill/>
-        </p:spPr>
-        <p:txBody>
-          <a:bodyPr wrap="square" anchor="t">
-            <a:spAutoFit/>
-          </a:bodyPr>
-          <a:lstStyle/>
-          <a:p>
-            <a:pPr algn="l"/>
+          <a:p>
+            <a:pPr algn="l">
+              <a:spcBef>
+                <a:spcPts val="0"/>
+              </a:spcBef>
+              <a:spcAft>
+                <a:spcPts val="200"/>
+              </a:spcAft>
+            </a:pPr>
             <a:r>
               <a:rPr sz="1200" b="1">
                 <a:solidFill>
@@ -6265,33 +5912,20 @@
               <a:t>Trainer note</a:t>
             </a:r>
           </a:p>
-        </p:txBody>
-      </p:sp>
-      <p:sp>
-        <p:nvSpPr>
-          <p:cNvPr id="16" name="TextBox 15"/>
-          <p:cNvSpPr txBox="1"/>
-          <p:nvPr/>
-        </p:nvSpPr>
-        <p:spPr>
-          <a:xfrm>
-            <a:off x="749808" y="5212080"/>
-            <a:ext cx="3931920" cy="640080"/>
-          </a:xfrm>
-          <a:prstGeom prst="rect">
-            <a:avLst/>
-          </a:prstGeom>
-          <a:noFill/>
-        </p:spPr>
-        <p:txBody>
-          <a:bodyPr wrap="square" anchor="t">
-            <a:spAutoFit/>
-          </a:bodyPr>
-          <a:lstStyle/>
-          <a:p>
-            <a:pPr algn="l"/>
-            <a:r>
-              <a:rPr sz="1300" b="0">
+          <a:p>
+            <a:pPr algn="l">
+              <a:lnSpc>
+                <a:spcPct val="110000"/>
+              </a:lnSpc>
+              <a:spcBef>
+                <a:spcPts val="0"/>
+              </a:spcBef>
+              <a:spcAft>
+                <a:spcPts val="0"/>
+              </a:spcAft>
+            </a:pPr>
+            <a:r>
+              <a:rPr sz="1200">
                 <a:solidFill>
                   <a:srgbClr val="52667A"/>
                 </a:solidFill>
@@ -6304,7 +5938,7 @@
       </p:sp>
       <p:sp>
         <p:nvSpPr>
-          <p:cNvPr id="17" name="Rounded Rectangle 16"/>
+          <p:cNvPr id="8" name="Rounded Rectangle 7"/>
           <p:cNvSpPr/>
           <p:nvPr/>
         </p:nvSpPr>
@@ -6349,7 +5983,7 @@
       </p:sp>
       <p:sp>
         <p:nvSpPr>
-          <p:cNvPr id="18" name="TextBox 17"/>
+          <p:cNvPr id="9" name="TextBox 8"/>
           <p:cNvSpPr txBox="1"/>
           <p:nvPr/>
         </p:nvSpPr>
@@ -6384,7 +6018,7 @@
       </p:sp>
       <p:pic>
         <p:nvPicPr>
-          <p:cNvPr id="19" name="Picture 18" descr="collateral-messages.png"/>
+          <p:cNvPr id="10" name="Picture 9" descr="collateral-messages.png"/>
           <p:cNvPicPr>
             <a:picLocks noChangeAspect="1"/>
           </p:cNvPicPr>
@@ -6408,7 +6042,7 @@
       </p:pic>
       <p:sp>
         <p:nvSpPr>
-          <p:cNvPr id="20" name="TextBox 19"/>
+          <p:cNvPr id="11" name="TextBox 10"/>
           <p:cNvSpPr txBox="1"/>
           <p:nvPr/>
         </p:nvSpPr>
@@ -6443,7 +6077,7 @@
       </p:sp>
       <p:sp>
         <p:nvSpPr>
-          <p:cNvPr id="21" name="TextBox 20"/>
+          <p:cNvPr id="12" name="TextBox 11"/>
           <p:cNvSpPr txBox="1"/>
           <p:nvPr/>
         </p:nvSpPr>
@@ -6716,7 +6350,7 @@
         <p:spPr>
           <a:xfrm>
             <a:off x="749808" y="1097280"/>
-            <a:ext cx="4023360" cy="256032"/>
+            <a:ext cx="3931920" cy="4754880"/>
           </a:xfrm>
           <a:prstGeom prst="rect">
             <a:avLst/>
@@ -6724,12 +6358,19 @@
           <a:noFill/>
         </p:spPr>
         <p:txBody>
-          <a:bodyPr wrap="square" anchor="t">
+          <a:bodyPr wrap="square" lIns="0" rIns="0" tIns="0" bIns="0">
             <a:spAutoFit/>
           </a:bodyPr>
           <a:lstStyle/>
           <a:p>
-            <a:pPr algn="l"/>
+            <a:pPr algn="l">
+              <a:spcBef>
+                <a:spcPts val="0"/>
+              </a:spcBef>
+              <a:spcAft>
+                <a:spcPts val="200"/>
+              </a:spcAft>
+            </a:pPr>
             <a:r>
               <a:rPr sz="1200" b="1">
                 <a:solidFill>
@@ -6740,66 +6381,37 @@
               <a:t>User action</a:t>
             </a:r>
           </a:p>
-        </p:txBody>
-      </p:sp>
-      <p:sp>
-        <p:nvSpPr>
-          <p:cNvPr id="8" name="TextBox 7"/>
-          <p:cNvSpPr txBox="1"/>
-          <p:nvPr/>
-        </p:nvSpPr>
-        <p:spPr>
-          <a:xfrm>
-            <a:off x="749808" y="1353312"/>
-            <a:ext cx="3931920" cy="621792"/>
-          </a:xfrm>
-          <a:prstGeom prst="rect">
-            <a:avLst/>
-          </a:prstGeom>
-          <a:noFill/>
-        </p:spPr>
-        <p:txBody>
-          <a:bodyPr wrap="square" anchor="t">
-            <a:spAutoFit/>
-          </a:bodyPr>
-          <a:lstStyle/>
-          <a:p>
-            <a:pPr algn="l"/>
-            <a:r>
-              <a:rPr sz="1600" b="0">
+          <a:p>
+            <a:pPr algn="l">
+              <a:lnSpc>
+                <a:spcPct val="110000"/>
+              </a:lnSpc>
+              <a:spcBef>
+                <a:spcPts val="0"/>
+              </a:spcBef>
+              <a:spcAft>
+                <a:spcPts val="800"/>
+              </a:spcAft>
+            </a:pPr>
+            <a:r>
+              <a:rPr sz="1300">
                 <a:solidFill>
                   <a:srgbClr val="102A43"/>
                 </a:solidFill>
                 <a:latin typeface="Aptos"/>
               </a:rPr>
-              <a:t>Open the Edit Calendar screen and confirm the start and end dates for the campaign-collateral mapping.</a:t>
-            </a:r>
-          </a:p>
-        </p:txBody>
-      </p:sp>
-      <p:sp>
-        <p:nvSpPr>
-          <p:cNvPr id="9" name="TextBox 8"/>
-          <p:cNvSpPr txBox="1"/>
-          <p:nvPr/>
-        </p:nvSpPr>
-        <p:spPr>
-          <a:xfrm>
-            <a:off x="749808" y="2011680"/>
-            <a:ext cx="4023360" cy="256032"/>
-          </a:xfrm>
-          <a:prstGeom prst="rect">
-            <a:avLst/>
-          </a:prstGeom>
-          <a:noFill/>
-        </p:spPr>
-        <p:txBody>
-          <a:bodyPr wrap="square" anchor="t">
-            <a:spAutoFit/>
-          </a:bodyPr>
-          <a:lstStyle/>
-          <a:p>
-            <a:pPr algn="l"/>
+              <a:t>Open the Edit Calendar screen from the top dashboard button or the row-level `Edit Dates` action and confirm the start and end dates for the campaign-collateral mapping.</a:t>
+            </a:r>
+          </a:p>
+          <a:p>
+            <a:pPr algn="l">
+              <a:spcBef>
+                <a:spcPts val="0"/>
+              </a:spcBef>
+              <a:spcAft>
+                <a:spcPts val="200"/>
+              </a:spcAft>
+            </a:pPr>
             <a:r>
               <a:rPr sz="1200" b="1">
                 <a:solidFill>
@@ -6810,66 +6422,37 @@
               <a:t>What appears on screen</a:t>
             </a:r>
           </a:p>
-        </p:txBody>
-      </p:sp>
-      <p:sp>
-        <p:nvSpPr>
-          <p:cNvPr id="10" name="TextBox 9"/>
-          <p:cNvSpPr txBox="1"/>
-          <p:nvPr/>
-        </p:nvSpPr>
-        <p:spPr>
-          <a:xfrm>
-            <a:off x="749808" y="2267712"/>
-            <a:ext cx="3931920" cy="713232"/>
-          </a:xfrm>
-          <a:prstGeom prst="rect">
-            <a:avLst/>
-          </a:prstGeom>
-          <a:noFill/>
-        </p:spPr>
-        <p:txBody>
-          <a:bodyPr wrap="square" anchor="t">
-            <a:spAutoFit/>
-          </a:bodyPr>
-          <a:lstStyle/>
-          <a:p>
-            <a:pPr algn="l"/>
-            <a:r>
-              <a:rPr sz="1600" b="0">
+          <a:p>
+            <a:pPr algn="l">
+              <a:lnSpc>
+                <a:spcPct val="110000"/>
+              </a:lnSpc>
+              <a:spcBef>
+                <a:spcPts val="0"/>
+              </a:spcBef>
+              <a:spcAft>
+                <a:spcPts val="800"/>
+              </a:spcAft>
+            </a:pPr>
+            <a:r>
+              <a:rPr sz="1300">
                 <a:solidFill>
                   <a:srgbClr val="102A43"/>
                 </a:solidFill>
                 <a:latin typeface="Aptos"/>
               </a:rPr>
-              <a:t>A calendar-edit screen that controls whether a collateral is active in the share flow on the current date.</a:t>
-            </a:r>
-          </a:p>
-        </p:txBody>
-      </p:sp>
-      <p:sp>
-        <p:nvSpPr>
-          <p:cNvPr id="11" name="TextBox 10"/>
-          <p:cNvSpPr txBox="1"/>
-          <p:nvPr/>
-        </p:nvSpPr>
-        <p:spPr>
-          <a:xfrm>
-            <a:off x="749808" y="3063240"/>
-            <a:ext cx="4023360" cy="256032"/>
-          </a:xfrm>
-          <a:prstGeom prst="rect">
-            <a:avLst/>
-          </a:prstGeom>
-          <a:noFill/>
-        </p:spPr>
-        <p:txBody>
-          <a:bodyPr wrap="square" anchor="t">
-            <a:spAutoFit/>
-          </a:bodyPr>
-          <a:lstStyle/>
-          <a:p>
-            <a:pPr algn="l"/>
+              <a:t>A calendar-edit screen that shows the campaign ID, collateral title, and editable start and end date controls.</a:t>
+            </a:r>
+          </a:p>
+          <a:p>
+            <a:pPr algn="l">
+              <a:spcBef>
+                <a:spcPts val="0"/>
+              </a:spcBef>
+              <a:spcAft>
+                <a:spcPts val="200"/>
+              </a:spcAft>
+            </a:pPr>
             <a:r>
               <a:rPr sz="1200" b="1">
                 <a:solidFill>
@@ -6880,33 +6463,20 @@
               <a:t>Why it matters</a:t>
             </a:r>
           </a:p>
-        </p:txBody>
-      </p:sp>
-      <p:sp>
-        <p:nvSpPr>
-          <p:cNvPr id="12" name="TextBox 11"/>
-          <p:cNvSpPr txBox="1"/>
-          <p:nvPr/>
-        </p:nvSpPr>
-        <p:spPr>
-          <a:xfrm>
-            <a:off x="749808" y="3319272"/>
-            <a:ext cx="3931920" cy="640080"/>
-          </a:xfrm>
-          <a:prstGeom prst="rect">
-            <a:avLst/>
-          </a:prstGeom>
-          <a:noFill/>
-        </p:spPr>
-        <p:txBody>
-          <a:bodyPr wrap="square" anchor="t">
-            <a:spAutoFit/>
-          </a:bodyPr>
-          <a:lstStyle/>
-          <a:p>
-            <a:pPr algn="l"/>
-            <a:r>
-              <a:rPr sz="1500" b="0">
+          <a:p>
+            <a:pPr algn="l">
+              <a:lnSpc>
+                <a:spcPct val="110000"/>
+              </a:lnSpc>
+              <a:spcBef>
+                <a:spcPts val="0"/>
+              </a:spcBef>
+              <a:spcAft>
+                <a:spcPts val="800"/>
+              </a:spcAft>
+            </a:pPr>
+            <a:r>
+              <a:rPr sz="1300">
                 <a:solidFill>
                   <a:srgbClr val="102A43"/>
                 </a:solidFill>
@@ -6915,31 +6485,15 @@
               <a:t>Availability windows are one of the key reasons a collateral might not appear for a field rep even when the asset exists.</a:t>
             </a:r>
           </a:p>
-        </p:txBody>
-      </p:sp>
-      <p:sp>
-        <p:nvSpPr>
-          <p:cNvPr id="13" name="TextBox 12"/>
-          <p:cNvSpPr txBox="1"/>
-          <p:nvPr/>
-        </p:nvSpPr>
-        <p:spPr>
-          <a:xfrm>
-            <a:off x="749808" y="4069080"/>
-            <a:ext cx="4023360" cy="256032"/>
-          </a:xfrm>
-          <a:prstGeom prst="rect">
-            <a:avLst/>
-          </a:prstGeom>
-          <a:noFill/>
-        </p:spPr>
-        <p:txBody>
-          <a:bodyPr wrap="square" anchor="t">
-            <a:spAutoFit/>
-          </a:bodyPr>
-          <a:lstStyle/>
-          <a:p>
-            <a:pPr algn="l"/>
+          <a:p>
+            <a:pPr algn="l">
+              <a:spcBef>
+                <a:spcPts val="0"/>
+              </a:spcBef>
+              <a:spcAft>
+                <a:spcPts val="200"/>
+              </a:spcAft>
+            </a:pPr>
             <a:r>
               <a:rPr sz="1200" b="1">
                 <a:solidFill>
@@ -6950,33 +6504,20 @@
               <a:t>Expected result</a:t>
             </a:r>
           </a:p>
-        </p:txBody>
-      </p:sp>
-      <p:sp>
-        <p:nvSpPr>
-          <p:cNvPr id="14" name="TextBox 13"/>
-          <p:cNvSpPr txBox="1"/>
-          <p:nvPr/>
-        </p:nvSpPr>
-        <p:spPr>
-          <a:xfrm>
-            <a:off x="749808" y="4325112"/>
-            <a:ext cx="3931920" cy="566928"/>
-          </a:xfrm>
-          <a:prstGeom prst="rect">
-            <a:avLst/>
-          </a:prstGeom>
-          <a:noFill/>
-        </p:spPr>
-        <p:txBody>
-          <a:bodyPr wrap="square" anchor="t">
-            <a:spAutoFit/>
-          </a:bodyPr>
-          <a:lstStyle/>
-          <a:p>
-            <a:pPr algn="l"/>
-            <a:r>
-              <a:rPr sz="1500" b="0">
+          <a:p>
+            <a:pPr algn="l">
+              <a:lnSpc>
+                <a:spcPct val="110000"/>
+              </a:lnSpc>
+              <a:spcBef>
+                <a:spcPts val="0"/>
+              </a:spcBef>
+              <a:spcAft>
+                <a:spcPts val="800"/>
+              </a:spcAft>
+            </a:pPr>
+            <a:r>
+              <a:rPr sz="1300">
                 <a:solidFill>
                   <a:srgbClr val="102A43"/>
                 </a:solidFill>
@@ -6985,31 +6526,15 @@
               <a:t>Only the intended collateral is active during the campaign window.</a:t>
             </a:r>
           </a:p>
-        </p:txBody>
-      </p:sp>
-      <p:sp>
-        <p:nvSpPr>
-          <p:cNvPr id="15" name="TextBox 14"/>
-          <p:cNvSpPr txBox="1"/>
-          <p:nvPr/>
-        </p:nvSpPr>
-        <p:spPr>
-          <a:xfrm>
-            <a:off x="749808" y="4965192"/>
-            <a:ext cx="4023360" cy="256032"/>
-          </a:xfrm>
-          <a:prstGeom prst="rect">
-            <a:avLst/>
-          </a:prstGeom>
-          <a:noFill/>
-        </p:spPr>
-        <p:txBody>
-          <a:bodyPr wrap="square" anchor="t">
-            <a:spAutoFit/>
-          </a:bodyPr>
-          <a:lstStyle/>
-          <a:p>
-            <a:pPr algn="l"/>
+          <a:p>
+            <a:pPr algn="l">
+              <a:spcBef>
+                <a:spcPts val="0"/>
+              </a:spcBef>
+              <a:spcAft>
+                <a:spcPts val="200"/>
+              </a:spcAft>
+            </a:pPr>
             <a:r>
               <a:rPr sz="1200" b="1">
                 <a:solidFill>
@@ -7020,33 +6545,20 @@
               <a:t>Trainer note</a:t>
             </a:r>
           </a:p>
-        </p:txBody>
-      </p:sp>
-      <p:sp>
-        <p:nvSpPr>
-          <p:cNvPr id="16" name="TextBox 15"/>
-          <p:cNvSpPr txBox="1"/>
-          <p:nvPr/>
-        </p:nvSpPr>
-        <p:spPr>
-          <a:xfrm>
-            <a:off x="749808" y="5212080"/>
-            <a:ext cx="3931920" cy="640080"/>
-          </a:xfrm>
-          <a:prstGeom prst="rect">
-            <a:avLst/>
-          </a:prstGeom>
-          <a:noFill/>
-        </p:spPr>
-        <p:txBody>
-          <a:bodyPr wrap="square" anchor="t">
-            <a:spAutoFit/>
-          </a:bodyPr>
-          <a:lstStyle/>
-          <a:p>
-            <a:pPr algn="l"/>
-            <a:r>
-              <a:rPr sz="1300" b="0">
+          <a:p>
+            <a:pPr algn="l">
+              <a:lnSpc>
+                <a:spcPct val="110000"/>
+              </a:lnSpc>
+              <a:spcBef>
+                <a:spcPts val="0"/>
+              </a:spcBef>
+              <a:spcAft>
+                <a:spcPts val="0"/>
+              </a:spcAft>
+            </a:pPr>
+            <a:r>
+              <a:rPr sz="1200">
                 <a:solidFill>
                   <a:srgbClr val="52667A"/>
                 </a:solidFill>
@@ -7059,7 +6571,7 @@
       </p:sp>
       <p:sp>
         <p:nvSpPr>
-          <p:cNvPr id="17" name="Rounded Rectangle 16"/>
+          <p:cNvPr id="8" name="Rounded Rectangle 7"/>
           <p:cNvSpPr/>
           <p:nvPr/>
         </p:nvSpPr>
@@ -7104,7 +6616,7 @@
       </p:sp>
       <p:sp>
         <p:nvSpPr>
-          <p:cNvPr id="18" name="TextBox 17"/>
+          <p:cNvPr id="9" name="TextBox 8"/>
           <p:cNvSpPr txBox="1"/>
           <p:nvPr/>
         </p:nvSpPr>
@@ -7139,7 +6651,7 @@
       </p:sp>
       <p:pic>
         <p:nvPicPr>
-          <p:cNvPr id="19" name="Picture 18" descr="edit-calendar.png"/>
+          <p:cNvPr id="10" name="Picture 9" descr="edit-calendar.png"/>
           <p:cNvPicPr>
             <a:picLocks noChangeAspect="1"/>
           </p:cNvPicPr>
@@ -7163,7 +6675,7 @@
       </p:pic>
       <p:sp>
         <p:nvSpPr>
-          <p:cNvPr id="20" name="TextBox 19"/>
+          <p:cNvPr id="11" name="TextBox 10"/>
           <p:cNvSpPr txBox="1"/>
           <p:nvPr/>
         </p:nvSpPr>
@@ -7198,7 +6710,7 @@
       </p:sp>
       <p:sp>
         <p:nvSpPr>
-          <p:cNvPr id="21" name="TextBox 20"/>
+          <p:cNvPr id="12" name="TextBox 11"/>
           <p:cNvSpPr txBox="1"/>
           <p:nvPr/>
         </p:nvSpPr>
@@ -7609,7 +7121,7 @@
                 </a:solidFill>
                 <a:latin typeface="Aptos"/>
               </a:rPr>
-              <a:t>Validated against the seeded collateral dashboard and forms on 2026-04-11.</a:t>
+              <a:t>Validated against the seeded collateral dashboard and forms on 2026-04-23.</a:t>
             </a:r>
           </a:p>
         </p:txBody>
@@ -7903,7 +7415,7 @@
                 </a:solidFill>
                 <a:latin typeface="Aptos"/>
               </a:rPr>
-              <a:t>Validated against the seeded collateral dashboard and forms on 2026-04-11.</a:t>
+              <a:t>Validated against the seeded collateral dashboard and forms on 2026-04-23.</a:t>
             </a:r>
           </a:p>
         </p:txBody>

--- a/output/doc/user-flow-decks/05-collateral-authoring-and-message-setup.pptx
+++ b/output/doc/user-flow-decks/05-collateral-authoring-and-message-setup.pptx
@@ -4135,7 +4135,7 @@
                 </a:solidFill>
                 <a:latin typeface="Aptos"/>
               </a:rPr>
-              <a:t>The collateral dashboard is the campaign-scoped control panel for asset inventory, calendar edits, doctor-upload shortcuts, and rep-facing entry points.</a:t>
+              <a:t>The collateral dashboard is the campaign-scoped control panel for asset inventory, calendar edits, and rep-facing entry points.</a:t>
             </a:r>
           </a:p>
           <a:p>
@@ -4542,7 +4542,7 @@
                 </a:solidFill>
                 <a:latin typeface="Aptos"/>
               </a:rPr>
-              <a:t>A campaign-scoped dashboard with top buttons for `Add Collaterals`, `Edit Calendar`, `Doctor Bulk Upload`, `Field Rep Login`, and `Back to Home`, plus a collateral table with `Link`, `Edit Dates`, `Replace Collateral`, and `Delete` actions.</a:t>
+              <a:t>A campaign-scoped dashboard with top buttons for `Add Collaterals`, `Edit Calendar`, `Field Rep Login`, and `Back to Home`, plus a collateral table with `Link`, `Edit Dates`, `Replace Collateral`, and `Delete` actions.</a:t>
             </a:r>
           </a:p>
           <a:p>
